--- a/presentations/presentation.pptx
+++ b/presentations/presentation.pptx
@@ -25972,7 +25972,7 @@
                 </a:solidFill>
                 <a:latin typeface="Calibri"/>
               </a:rPr>
-              <a:t>Choose the negative-sampling strategy for a new, unseen domain automatically, using cheap pilot runs instead of the user's judgement.</a:t>
+              <a:t>Choose the negative-sampling strategy for a new, unseen domain automatically, using pilot experiments instead of the user's judgement.</a:t>
             </a:r>
           </a:p>
           <a:p>
